--- a/youtube-slides/からだの不思議08_まぶたピクピク/まぶたピクピク_スライド.pptx
+++ b/youtube-slides/からだの不思議08_まぶたピクピク/まぶたピクピク_スライド.pptx
@@ -3324,11 +3324,13 @@
             <a:off x="274320" y="2834640"/>
             <a:ext cx="1554480" cy="1371600"/>
           </a:xfrm>
-          <a:prstGeom prst="rect">
-            <a:avLst/>
-          </a:prstGeom>
-          <a:solidFill>
-            <a:srgbClr val="FFFFFF"/>
+          <a:prstGeom prst="roundRect">
+            <a:avLst>
+              <a:gd name="adj" fmla="val 5333"/>
+            </a:avLst>
+          </a:prstGeom>
+          <a:solidFill>
+            <a:srgbClr val="DC3545"/>
           </a:solidFill>
           <a:ln/>
           <a:effectLst>
@@ -3342,27 +3344,7 @@
       </p:sp>
       <p:sp>
         <p:nvSpPr>
-          <p:cNvPr id="8" name="Shape 6"/>
-          <p:cNvSpPr/>
-          <p:nvPr/>
-        </p:nvSpPr>
-        <p:spPr>
-          <a:xfrm>
-            <a:off x="274320" y="2834640"/>
-            <a:ext cx="1554480" cy="411480"/>
-          </a:xfrm>
-          <a:prstGeom prst="rect">
-            <a:avLst/>
-          </a:prstGeom>
-          <a:solidFill>
-            <a:srgbClr val="DC3545"/>
-          </a:solidFill>
-          <a:ln/>
-        </p:spPr>
-      </p:sp>
-      <p:sp>
-        <p:nvSpPr>
-          <p:cNvPr id="9" name="Text 7"/>
+          <p:cNvPr id="8" name="Text 6"/>
           <p:cNvSpPr/>
           <p:nvPr/>
         </p:nvSpPr>
@@ -3378,7 +3360,7 @@
           <a:ln/>
         </p:spPr>
         <p:txBody>
-          <a:bodyPr wrap="square" lIns="0" tIns="0" rIns="0" bIns="0" rtlCol="0" anchor="ctr"/>
+          <a:bodyPr wrap="square" lIns="50800" tIns="50800" rIns="50800" bIns="50800" rtlCol="0" anchor="ctr"/>
           <a:lstStyle/>
           <a:p>
             <a:pPr algn="ctr" indent="0" marL="0">
@@ -3388,7 +3370,7 @@
               <a:buNone/>
             </a:pPr>
             <a:r>
-              <a:rPr lang="en-US" sz="1400" b="1" dirty="0">
+              <a:rPr lang="en-US" sz="1500" b="1" dirty="0">
                 <a:solidFill>
                   <a:srgbClr val="FFFFFF"/>
                 </a:solidFill>
@@ -3398,7 +3380,7 @@
               </a:rPr>
               <a:t>睡眠不足</a:t>
             </a:r>
-            <a:endParaRPr lang="en-US" sz="1400" dirty="0"/>
+            <a:endParaRPr lang="en-US" sz="1500" dirty="0"/>
           </a:p>
           <a:p>
             <a:pPr algn="ctr" indent="0" marL="0">
@@ -3408,7 +3390,7 @@
               <a:buNone/>
             </a:pPr>
             <a:r>
-              <a:rPr lang="en-US" sz="1400" b="1" dirty="0">
+              <a:rPr lang="en-US" sz="1500" b="1" dirty="0">
                 <a:solidFill>
                   <a:srgbClr val="FFFFFF"/>
                 </a:solidFill>
@@ -3418,13 +3400,13 @@
               </a:rPr>
               <a:t>疲労</a:t>
             </a:r>
-            <a:endParaRPr lang="en-US" sz="1400" dirty="0"/>
-          </a:p>
-        </p:txBody>
-      </p:sp>
-      <p:sp>
-        <p:nvSpPr>
-          <p:cNvPr id="10" name="Shape 8"/>
+            <a:endParaRPr lang="en-US" sz="1500" dirty="0"/>
+          </a:p>
+        </p:txBody>
+      </p:sp>
+      <p:sp>
+        <p:nvSpPr>
+          <p:cNvPr id="9" name="Shape 7"/>
           <p:cNvSpPr/>
           <p:nvPr/>
         </p:nvSpPr>
@@ -3433,11 +3415,13 @@
             <a:off x="1993392" y="2834640"/>
             <a:ext cx="1554480" cy="1371600"/>
           </a:xfrm>
-          <a:prstGeom prst="rect">
-            <a:avLst/>
-          </a:prstGeom>
-          <a:solidFill>
-            <a:srgbClr val="FFFFFF"/>
+          <a:prstGeom prst="roundRect">
+            <a:avLst>
+              <a:gd name="adj" fmla="val 5333"/>
+            </a:avLst>
+          </a:prstGeom>
+          <a:solidFill>
+            <a:srgbClr val="E8850C"/>
           </a:solidFill>
           <a:ln/>
           <a:effectLst>
@@ -3451,27 +3435,7 @@
       </p:sp>
       <p:sp>
         <p:nvSpPr>
-          <p:cNvPr id="11" name="Shape 9"/>
-          <p:cNvSpPr/>
-          <p:nvPr/>
-        </p:nvSpPr>
-        <p:spPr>
-          <a:xfrm>
-            <a:off x="1993392" y="2834640"/>
-            <a:ext cx="1554480" cy="411480"/>
-          </a:xfrm>
-          <a:prstGeom prst="rect">
-            <a:avLst/>
-          </a:prstGeom>
-          <a:solidFill>
-            <a:srgbClr val="E8850C"/>
-          </a:solidFill>
-          <a:ln/>
-        </p:spPr>
-      </p:sp>
-      <p:sp>
-        <p:nvSpPr>
-          <p:cNvPr id="12" name="Text 10"/>
+          <p:cNvPr id="10" name="Text 8"/>
           <p:cNvSpPr/>
           <p:nvPr/>
         </p:nvSpPr>
@@ -3487,7 +3451,7 @@
           <a:ln/>
         </p:spPr>
         <p:txBody>
-          <a:bodyPr wrap="square" lIns="0" tIns="0" rIns="0" bIns="0" rtlCol="0" anchor="ctr"/>
+          <a:bodyPr wrap="square" lIns="50800" tIns="50800" rIns="50800" bIns="50800" rtlCol="0" anchor="ctr"/>
           <a:lstStyle/>
           <a:p>
             <a:pPr algn="ctr" indent="0" marL="0">
@@ -3497,7 +3461,7 @@
               <a:buNone/>
             </a:pPr>
             <a:r>
-              <a:rPr lang="en-US" sz="1400" b="1" dirty="0">
+              <a:rPr lang="en-US" sz="1500" b="1" dirty="0">
                 <a:solidFill>
                   <a:srgbClr val="FFFFFF"/>
                 </a:solidFill>
@@ -3507,7 +3471,7 @@
               </a:rPr>
               <a:t>カフェイン</a:t>
             </a:r>
-            <a:endParaRPr lang="en-US" sz="1400" dirty="0"/>
+            <a:endParaRPr lang="en-US" sz="1500" dirty="0"/>
           </a:p>
           <a:p>
             <a:pPr algn="ctr" indent="0" marL="0">
@@ -3517,7 +3481,7 @@
               <a:buNone/>
             </a:pPr>
             <a:r>
-              <a:rPr lang="en-US" sz="1400" b="1" dirty="0">
+              <a:rPr lang="en-US" sz="1500" b="1" dirty="0">
                 <a:solidFill>
                   <a:srgbClr val="FFFFFF"/>
                 </a:solidFill>
@@ -3527,13 +3491,13 @@
               </a:rPr>
               <a:t>過多</a:t>
             </a:r>
-            <a:endParaRPr lang="en-US" sz="1400" dirty="0"/>
-          </a:p>
-        </p:txBody>
-      </p:sp>
-      <p:sp>
-        <p:nvSpPr>
-          <p:cNvPr id="13" name="Shape 11"/>
+            <a:endParaRPr lang="en-US" sz="1500" dirty="0"/>
+          </a:p>
+        </p:txBody>
+      </p:sp>
+      <p:sp>
+        <p:nvSpPr>
+          <p:cNvPr id="11" name="Shape 9"/>
           <p:cNvSpPr/>
           <p:nvPr/>
         </p:nvSpPr>
@@ -3542,11 +3506,13 @@
             <a:off x="3712464" y="2834640"/>
             <a:ext cx="1554480" cy="1371600"/>
           </a:xfrm>
-          <a:prstGeom prst="rect">
-            <a:avLst/>
-          </a:prstGeom>
-          <a:solidFill>
-            <a:srgbClr val="FFFFFF"/>
+          <a:prstGeom prst="roundRect">
+            <a:avLst>
+              <a:gd name="adj" fmla="val 5333"/>
+            </a:avLst>
+          </a:prstGeom>
+          <a:solidFill>
+            <a:srgbClr val="F5C518"/>
           </a:solidFill>
           <a:ln/>
           <a:effectLst>
@@ -3560,27 +3526,7 @@
       </p:sp>
       <p:sp>
         <p:nvSpPr>
-          <p:cNvPr id="14" name="Shape 12"/>
-          <p:cNvSpPr/>
-          <p:nvPr/>
-        </p:nvSpPr>
-        <p:spPr>
-          <a:xfrm>
-            <a:off x="3712464" y="2834640"/>
-            <a:ext cx="1554480" cy="411480"/>
-          </a:xfrm>
-          <a:prstGeom prst="rect">
-            <a:avLst/>
-          </a:prstGeom>
-          <a:solidFill>
-            <a:srgbClr val="F5C518"/>
-          </a:solidFill>
-          <a:ln/>
-        </p:spPr>
-      </p:sp>
-      <p:sp>
-        <p:nvSpPr>
-          <p:cNvPr id="15" name="Text 13"/>
+          <p:cNvPr id="12" name="Text 10"/>
           <p:cNvSpPr/>
           <p:nvPr/>
         </p:nvSpPr>
@@ -3596,7 +3542,7 @@
           <a:ln/>
         </p:spPr>
         <p:txBody>
-          <a:bodyPr wrap="square" lIns="0" tIns="0" rIns="0" bIns="0" rtlCol="0" anchor="ctr"/>
+          <a:bodyPr wrap="square" lIns="50800" tIns="50800" rIns="50800" bIns="50800" rtlCol="0" anchor="ctr"/>
           <a:lstStyle/>
           <a:p>
             <a:pPr algn="ctr" indent="0" marL="0">
@@ -3606,7 +3552,7 @@
               <a:buNone/>
             </a:pPr>
             <a:r>
-              <a:rPr lang="en-US" sz="1400" b="1" dirty="0">
+              <a:rPr lang="en-US" sz="1500" b="1" dirty="0">
                 <a:solidFill>
                   <a:srgbClr val="FFFFFF"/>
                 </a:solidFill>
@@ -3616,7 +3562,7 @@
               </a:rPr>
               <a:t>ストレス</a:t>
             </a:r>
-            <a:endParaRPr lang="en-US" sz="1400" dirty="0"/>
+            <a:endParaRPr lang="en-US" sz="1500" dirty="0"/>
           </a:p>
           <a:p>
             <a:pPr algn="ctr" indent="0" marL="0">
@@ -3626,7 +3572,7 @@
               <a:buNone/>
             </a:pPr>
             <a:r>
-              <a:rPr lang="en-US" sz="1400" b="1" dirty="0">
+              <a:rPr lang="en-US" sz="1500" b="1" dirty="0">
                 <a:solidFill>
                   <a:srgbClr val="FFFFFF"/>
                 </a:solidFill>
@@ -3636,13 +3582,13 @@
               </a:rPr>
               <a:t>緊張</a:t>
             </a:r>
-            <a:endParaRPr lang="en-US" sz="1400" dirty="0"/>
-          </a:p>
-        </p:txBody>
-      </p:sp>
-      <p:sp>
-        <p:nvSpPr>
-          <p:cNvPr id="16" name="Shape 14"/>
+            <a:endParaRPr lang="en-US" sz="1500" dirty="0"/>
+          </a:p>
+        </p:txBody>
+      </p:sp>
+      <p:sp>
+        <p:nvSpPr>
+          <p:cNvPr id="13" name="Shape 11"/>
           <p:cNvSpPr/>
           <p:nvPr/>
         </p:nvSpPr>
@@ -3651,11 +3597,13 @@
             <a:off x="5431536" y="2834640"/>
             <a:ext cx="1554480" cy="1371600"/>
           </a:xfrm>
-          <a:prstGeom prst="rect">
-            <a:avLst/>
-          </a:prstGeom>
-          <a:solidFill>
-            <a:srgbClr val="FFFFFF"/>
+          <a:prstGeom prst="roundRect">
+            <a:avLst>
+              <a:gd name="adj" fmla="val 5333"/>
+            </a:avLst>
+          </a:prstGeom>
+          <a:solidFill>
+            <a:srgbClr val="4A90D9"/>
           </a:solidFill>
           <a:ln/>
           <a:effectLst>
@@ -3669,27 +3617,7 @@
       </p:sp>
       <p:sp>
         <p:nvSpPr>
-          <p:cNvPr id="17" name="Shape 15"/>
-          <p:cNvSpPr/>
-          <p:nvPr/>
-        </p:nvSpPr>
-        <p:spPr>
-          <a:xfrm>
-            <a:off x="5431536" y="2834640"/>
-            <a:ext cx="1554480" cy="411480"/>
-          </a:xfrm>
-          <a:prstGeom prst="rect">
-            <a:avLst/>
-          </a:prstGeom>
-          <a:solidFill>
-            <a:srgbClr val="4A90D9"/>
-          </a:solidFill>
-          <a:ln/>
-        </p:spPr>
-      </p:sp>
-      <p:sp>
-        <p:nvSpPr>
-          <p:cNvPr id="18" name="Text 16"/>
+          <p:cNvPr id="14" name="Text 12"/>
           <p:cNvSpPr/>
           <p:nvPr/>
         </p:nvSpPr>
@@ -3705,7 +3633,7 @@
           <a:ln/>
         </p:spPr>
         <p:txBody>
-          <a:bodyPr wrap="square" lIns="0" tIns="0" rIns="0" bIns="0" rtlCol="0" anchor="ctr"/>
+          <a:bodyPr wrap="square" lIns="50800" tIns="50800" rIns="50800" bIns="50800" rtlCol="0" anchor="ctr"/>
           <a:lstStyle/>
           <a:p>
             <a:pPr algn="ctr" indent="0" marL="0">
@@ -3715,7 +3643,7 @@
               <a:buNone/>
             </a:pPr>
             <a:r>
-              <a:rPr lang="en-US" sz="1400" b="1" dirty="0">
+              <a:rPr lang="en-US" sz="1500" b="1" dirty="0">
                 <a:solidFill>
                   <a:srgbClr val="FFFFFF"/>
                 </a:solidFill>
@@ -3725,7 +3653,7 @@
               </a:rPr>
               <a:t>スクリーン</a:t>
             </a:r>
-            <a:endParaRPr lang="en-US" sz="1400" dirty="0"/>
+            <a:endParaRPr lang="en-US" sz="1500" dirty="0"/>
           </a:p>
           <a:p>
             <a:pPr algn="ctr" indent="0" marL="0">
@@ -3735,7 +3663,7 @@
               <a:buNone/>
             </a:pPr>
             <a:r>
-              <a:rPr lang="en-US" sz="1400" b="1" dirty="0">
+              <a:rPr lang="en-US" sz="1500" b="1" dirty="0">
                 <a:solidFill>
                   <a:srgbClr val="FFFFFF"/>
                 </a:solidFill>
@@ -3745,13 +3673,13 @@
               </a:rPr>
               <a:t>疲労</a:t>
             </a:r>
-            <a:endParaRPr lang="en-US" sz="1400" dirty="0"/>
-          </a:p>
-        </p:txBody>
-      </p:sp>
-      <p:sp>
-        <p:nvSpPr>
-          <p:cNvPr id="19" name="Shape 17"/>
+            <a:endParaRPr lang="en-US" sz="1500" dirty="0"/>
+          </a:p>
+        </p:txBody>
+      </p:sp>
+      <p:sp>
+        <p:nvSpPr>
+          <p:cNvPr id="15" name="Shape 13"/>
           <p:cNvSpPr/>
           <p:nvPr/>
         </p:nvSpPr>
@@ -3760,11 +3688,13 @@
             <a:off x="7150608" y="2834640"/>
             <a:ext cx="1554480" cy="1371600"/>
           </a:xfrm>
-          <a:prstGeom prst="rect">
-            <a:avLst/>
-          </a:prstGeom>
-          <a:solidFill>
-            <a:srgbClr val="FFFFFF"/>
+          <a:prstGeom prst="roundRect">
+            <a:avLst>
+              <a:gd name="adj" fmla="val 5333"/>
+            </a:avLst>
+          </a:prstGeom>
+          <a:solidFill>
+            <a:srgbClr val="28A745"/>
           </a:solidFill>
           <a:ln/>
           <a:effectLst>
@@ -3778,27 +3708,7 @@
       </p:sp>
       <p:sp>
         <p:nvSpPr>
-          <p:cNvPr id="20" name="Shape 18"/>
-          <p:cNvSpPr/>
-          <p:nvPr/>
-        </p:nvSpPr>
-        <p:spPr>
-          <a:xfrm>
-            <a:off x="7150608" y="2834640"/>
-            <a:ext cx="1554480" cy="411480"/>
-          </a:xfrm>
-          <a:prstGeom prst="rect">
-            <a:avLst/>
-          </a:prstGeom>
-          <a:solidFill>
-            <a:srgbClr val="28A745"/>
-          </a:solidFill>
-          <a:ln/>
-        </p:spPr>
-      </p:sp>
-      <p:sp>
-        <p:nvSpPr>
-          <p:cNvPr id="21" name="Text 19"/>
+          <p:cNvPr id="16" name="Text 14"/>
           <p:cNvSpPr/>
           <p:nvPr/>
         </p:nvSpPr>
@@ -3814,7 +3724,7 @@
           <a:ln/>
         </p:spPr>
         <p:txBody>
-          <a:bodyPr wrap="square" lIns="0" tIns="0" rIns="0" bIns="0" rtlCol="0" anchor="ctr"/>
+          <a:bodyPr wrap="square" lIns="50800" tIns="50800" rIns="50800" bIns="50800" rtlCol="0" anchor="ctr"/>
           <a:lstStyle/>
           <a:p>
             <a:pPr algn="ctr" indent="0" marL="0">
@@ -3824,7 +3734,7 @@
               <a:buNone/>
             </a:pPr>
             <a:r>
-              <a:rPr lang="en-US" sz="1400" b="1" dirty="0">
+              <a:rPr lang="en-US" sz="1500" b="1" dirty="0">
                 <a:solidFill>
                   <a:srgbClr val="FFFFFF"/>
                 </a:solidFill>
@@ -3834,7 +3744,7 @@
               </a:rPr>
               <a:t>ドライアイ</a:t>
             </a:r>
-            <a:endParaRPr lang="en-US" sz="1400" dirty="0"/>
+            <a:endParaRPr lang="en-US" sz="1500" dirty="0"/>
           </a:p>
           <a:p>
             <a:pPr algn="ctr" indent="0" marL="0">
@@ -3844,7 +3754,7 @@
               <a:buNone/>
             </a:pPr>
             <a:r>
-              <a:rPr lang="en-US" sz="1400" b="1" dirty="0">
+              <a:rPr lang="en-US" sz="1500" b="1" dirty="0">
                 <a:solidFill>
                   <a:srgbClr val="FFFFFF"/>
                 </a:solidFill>
@@ -3854,13 +3764,13 @@
               </a:rPr>
               <a:t>アルコール</a:t>
             </a:r>
-            <a:endParaRPr lang="en-US" sz="1400" dirty="0"/>
-          </a:p>
-        </p:txBody>
-      </p:sp>
-      <p:sp>
-        <p:nvSpPr>
-          <p:cNvPr id="22" name="Text 20"/>
+            <a:endParaRPr lang="en-US" sz="1500" dirty="0"/>
+          </a:p>
+        </p:txBody>
+      </p:sp>
+      <p:sp>
+        <p:nvSpPr>
+          <p:cNvPr id="17" name="Text 15"/>
           <p:cNvSpPr/>
           <p:nvPr/>
         </p:nvSpPr>
@@ -3899,7 +3809,7 @@
       </p:sp>
       <p:sp>
         <p:nvSpPr>
-          <p:cNvPr id="23" name="Shape 21"/>
+          <p:cNvPr id="18" name="Shape 16"/>
           <p:cNvSpPr/>
           <p:nvPr/>
         </p:nvSpPr>
@@ -3919,7 +3829,7 @@
       </p:sp>
       <p:sp>
         <p:nvSpPr>
-          <p:cNvPr id="24" name="Text 22"/>
+          <p:cNvPr id="19" name="Text 17"/>
           <p:cNvSpPr/>
           <p:nvPr/>
         </p:nvSpPr>
@@ -3958,7 +3868,7 @@
       </p:sp>
       <p:sp>
         <p:nvSpPr>
-          <p:cNvPr id="25" name="Text 23"/>
+          <p:cNvPr id="20" name="Text 18"/>
           <p:cNvSpPr/>
           <p:nvPr/>
         </p:nvSpPr>
@@ -4115,14 +4025,34 @@
       </p:sp>
       <p:sp>
         <p:nvSpPr>
-          <p:cNvPr id="5" name="Text 3"/>
-          <p:cNvSpPr/>
-          <p:nvPr/>
-        </p:nvSpPr>
-        <p:spPr>
-          <a:xfrm>
-            <a:off x="182880" y="1234440"/>
-            <a:ext cx="2011680" cy="640080"/>
+          <p:cNvPr id="5" name="Shape 3"/>
+          <p:cNvSpPr/>
+          <p:nvPr/>
+        </p:nvSpPr>
+        <p:spPr>
+          <a:xfrm>
+            <a:off x="822960" y="1234440"/>
+            <a:ext cx="731520" cy="731520"/>
+          </a:xfrm>
+          <a:prstGeom prst="ellipse">
+            <a:avLst/>
+          </a:prstGeom>
+          <a:solidFill>
+            <a:srgbClr val="E8850C"/>
+          </a:solidFill>
+          <a:ln/>
+        </p:spPr>
+      </p:sp>
+      <p:sp>
+        <p:nvSpPr>
+          <p:cNvPr id="6" name="Text 4"/>
+          <p:cNvSpPr/>
+          <p:nvPr/>
+        </p:nvSpPr>
+        <p:spPr>
+          <a:xfrm>
+            <a:off x="822960" y="1234440"/>
+            <a:ext cx="731520" cy="731520"/>
           </a:xfrm>
           <a:prstGeom prst="rect">
             <a:avLst/>
@@ -4138,36 +4068,19 @@
               <a:buNone/>
             </a:pPr>
             <a:r>
-              <a:rPr lang="en-US" sz="3000" dirty="0">
-                <a:solidFill>
-                  <a:srgbClr val="000000"/>
-                </a:solidFill>
-              </a:rPr>
-              <a:t>😴</a:t>
-            </a:r>
-            <a:endParaRPr lang="en-US" sz="3000" dirty="0"/>
-          </a:p>
-        </p:txBody>
-      </p:sp>
-      <p:sp>
-        <p:nvSpPr>
-          <p:cNvPr id="6" name="Shape 4"/>
-          <p:cNvSpPr/>
-          <p:nvPr/>
-        </p:nvSpPr>
-        <p:spPr>
-          <a:xfrm>
-            <a:off x="274320" y="1874520"/>
-            <a:ext cx="1828800" cy="365760"/>
-          </a:xfrm>
-          <a:prstGeom prst="rect">
-            <a:avLst/>
-          </a:prstGeom>
-          <a:solidFill>
-            <a:srgbClr val="E8850C"/>
-          </a:solidFill>
-          <a:ln/>
-        </p:spPr>
+              <a:rPr lang="en-US" sz="2600" b="1" dirty="0">
+                <a:solidFill>
+                  <a:srgbClr val="FFFFFF"/>
+                </a:solidFill>
+                <a:latin typeface="Segoe UI" pitchFamily="34" charset="0"/>
+                <a:ea typeface="Segoe UI" pitchFamily="34" charset="-122"/>
+                <a:cs typeface="Segoe UI" pitchFamily="34" charset="-120"/>
+              </a:rPr>
+              <a:t>1</a:t>
+            </a:r>
+            <a:endParaRPr lang="en-US" sz="2600" dirty="0"/>
+          </a:p>
+        </p:txBody>
       </p:sp>
       <p:sp>
         <p:nvSpPr>
@@ -4177,8 +4090,8 @@
         </p:nvSpPr>
         <p:spPr>
           <a:xfrm>
-            <a:off x="182880" y="2286000"/>
-            <a:ext cx="2011680" cy="914400"/>
+            <a:off x="274320" y="2103120"/>
+            <a:ext cx="1828800" cy="1097280"/>
           </a:xfrm>
           <a:prstGeom prst="rect">
             <a:avLst/>
@@ -4260,14 +4173,34 @@
       </p:sp>
       <p:sp>
         <p:nvSpPr>
-          <p:cNvPr id="9" name="Text 7"/>
-          <p:cNvSpPr/>
-          <p:nvPr/>
-        </p:nvSpPr>
-        <p:spPr>
-          <a:xfrm>
-            <a:off x="2423160" y="1234440"/>
-            <a:ext cx="2011680" cy="640080"/>
+          <p:cNvPr id="9" name="Shape 7"/>
+          <p:cNvSpPr/>
+          <p:nvPr/>
+        </p:nvSpPr>
+        <p:spPr>
+          <a:xfrm>
+            <a:off x="3063240" y="1234440"/>
+            <a:ext cx="731520" cy="731520"/>
+          </a:xfrm>
+          <a:prstGeom prst="ellipse">
+            <a:avLst/>
+          </a:prstGeom>
+          <a:solidFill>
+            <a:srgbClr val="F5C518"/>
+          </a:solidFill>
+          <a:ln/>
+        </p:spPr>
+      </p:sp>
+      <p:sp>
+        <p:nvSpPr>
+          <p:cNvPr id="10" name="Text 8"/>
+          <p:cNvSpPr/>
+          <p:nvPr/>
+        </p:nvSpPr>
+        <p:spPr>
+          <a:xfrm>
+            <a:off x="3063240" y="1234440"/>
+            <a:ext cx="731520" cy="731520"/>
           </a:xfrm>
           <a:prstGeom prst="rect">
             <a:avLst/>
@@ -4283,36 +4216,19 @@
               <a:buNone/>
             </a:pPr>
             <a:r>
-              <a:rPr lang="en-US" sz="3000" dirty="0">
-                <a:solidFill>
-                  <a:srgbClr val="000000"/>
-                </a:solidFill>
-              </a:rPr>
-              <a:t>⚡</a:t>
-            </a:r>
-            <a:endParaRPr lang="en-US" sz="3000" dirty="0"/>
-          </a:p>
-        </p:txBody>
-      </p:sp>
-      <p:sp>
-        <p:nvSpPr>
-          <p:cNvPr id="10" name="Shape 8"/>
-          <p:cNvSpPr/>
-          <p:nvPr/>
-        </p:nvSpPr>
-        <p:spPr>
-          <a:xfrm>
-            <a:off x="2514600" y="1874520"/>
-            <a:ext cx="1828800" cy="365760"/>
-          </a:xfrm>
-          <a:prstGeom prst="rect">
-            <a:avLst/>
-          </a:prstGeom>
-          <a:solidFill>
-            <a:srgbClr val="F5C518"/>
-          </a:solidFill>
-          <a:ln/>
-        </p:spPr>
+              <a:rPr lang="en-US" sz="2600" b="1" dirty="0">
+                <a:solidFill>
+                  <a:srgbClr val="FFFFFF"/>
+                </a:solidFill>
+                <a:latin typeface="Segoe UI" pitchFamily="34" charset="0"/>
+                <a:ea typeface="Segoe UI" pitchFamily="34" charset="-122"/>
+                <a:cs typeface="Segoe UI" pitchFamily="34" charset="-120"/>
+              </a:rPr>
+              <a:t>2</a:t>
+            </a:r>
+            <a:endParaRPr lang="en-US" sz="2600" dirty="0"/>
+          </a:p>
+        </p:txBody>
       </p:sp>
       <p:sp>
         <p:nvSpPr>
@@ -4322,8 +4238,8 @@
         </p:nvSpPr>
         <p:spPr>
           <a:xfrm>
-            <a:off x="2423160" y="2286000"/>
-            <a:ext cx="2011680" cy="914400"/>
+            <a:off x="2514600" y="2103120"/>
+            <a:ext cx="1828800" cy="1097280"/>
           </a:xfrm>
           <a:prstGeom prst="rect">
             <a:avLst/>
@@ -4405,14 +4321,34 @@
       </p:sp>
       <p:sp>
         <p:nvSpPr>
-          <p:cNvPr id="13" name="Text 11"/>
-          <p:cNvSpPr/>
-          <p:nvPr/>
-        </p:nvSpPr>
-        <p:spPr>
-          <a:xfrm>
-            <a:off x="4663440" y="1234440"/>
-            <a:ext cx="2011680" cy="640080"/>
+          <p:cNvPr id="13" name="Shape 11"/>
+          <p:cNvSpPr/>
+          <p:nvPr/>
+        </p:nvSpPr>
+        <p:spPr>
+          <a:xfrm>
+            <a:off x="5303520" y="1234440"/>
+            <a:ext cx="731520" cy="731520"/>
+          </a:xfrm>
+          <a:prstGeom prst="ellipse">
+            <a:avLst/>
+          </a:prstGeom>
+          <a:solidFill>
+            <a:srgbClr val="DC3545"/>
+          </a:solidFill>
+          <a:ln/>
+        </p:spPr>
+      </p:sp>
+      <p:sp>
+        <p:nvSpPr>
+          <p:cNvPr id="14" name="Text 12"/>
+          <p:cNvSpPr/>
+          <p:nvPr/>
+        </p:nvSpPr>
+        <p:spPr>
+          <a:xfrm>
+            <a:off x="5303520" y="1234440"/>
+            <a:ext cx="731520" cy="731520"/>
           </a:xfrm>
           <a:prstGeom prst="rect">
             <a:avLst/>
@@ -4428,36 +4364,19 @@
               <a:buNone/>
             </a:pPr>
             <a:r>
-              <a:rPr lang="en-US" sz="3000" dirty="0">
-                <a:solidFill>
-                  <a:srgbClr val="000000"/>
-                </a:solidFill>
-              </a:rPr>
-              <a:t>🔀</a:t>
-            </a:r>
-            <a:endParaRPr lang="en-US" sz="3000" dirty="0"/>
-          </a:p>
-        </p:txBody>
-      </p:sp>
-      <p:sp>
-        <p:nvSpPr>
-          <p:cNvPr id="14" name="Shape 12"/>
-          <p:cNvSpPr/>
-          <p:nvPr/>
-        </p:nvSpPr>
-        <p:spPr>
-          <a:xfrm>
-            <a:off x="4754880" y="1874520"/>
-            <a:ext cx="1828800" cy="365760"/>
-          </a:xfrm>
-          <a:prstGeom prst="rect">
-            <a:avLst/>
-          </a:prstGeom>
-          <a:solidFill>
-            <a:srgbClr val="DC3545"/>
-          </a:solidFill>
-          <a:ln/>
-        </p:spPr>
+              <a:rPr lang="en-US" sz="2600" b="1" dirty="0">
+                <a:solidFill>
+                  <a:srgbClr val="FFFFFF"/>
+                </a:solidFill>
+                <a:latin typeface="Segoe UI" pitchFamily="34" charset="0"/>
+                <a:ea typeface="Segoe UI" pitchFamily="34" charset="-122"/>
+                <a:cs typeface="Segoe UI" pitchFamily="34" charset="-120"/>
+              </a:rPr>
+              <a:t>3</a:t>
+            </a:r>
+            <a:endParaRPr lang="en-US" sz="2600" dirty="0"/>
+          </a:p>
+        </p:txBody>
       </p:sp>
       <p:sp>
         <p:nvSpPr>
@@ -4467,8 +4386,8 @@
         </p:nvSpPr>
         <p:spPr>
           <a:xfrm>
-            <a:off x="4663440" y="2286000"/>
-            <a:ext cx="2011680" cy="914400"/>
+            <a:off x="4754880" y="2103120"/>
+            <a:ext cx="1828800" cy="1097280"/>
           </a:xfrm>
           <a:prstGeom prst="rect">
             <a:avLst/>
@@ -4550,14 +4469,34 @@
       </p:sp>
       <p:sp>
         <p:nvSpPr>
-          <p:cNvPr id="17" name="Text 15"/>
-          <p:cNvSpPr/>
-          <p:nvPr/>
-        </p:nvSpPr>
-        <p:spPr>
-          <a:xfrm>
-            <a:off x="6903720" y="1234440"/>
-            <a:ext cx="2011680" cy="640080"/>
+          <p:cNvPr id="17" name="Shape 15"/>
+          <p:cNvSpPr/>
+          <p:nvPr/>
+        </p:nvSpPr>
+        <p:spPr>
+          <a:xfrm>
+            <a:off x="7543800" y="1234440"/>
+            <a:ext cx="731520" cy="731520"/>
+          </a:xfrm>
+          <a:prstGeom prst="ellipse">
+            <a:avLst/>
+          </a:prstGeom>
+          <a:solidFill>
+            <a:srgbClr val="2C5AA0"/>
+          </a:solidFill>
+          <a:ln/>
+        </p:spPr>
+      </p:sp>
+      <p:sp>
+        <p:nvSpPr>
+          <p:cNvPr id="18" name="Text 16"/>
+          <p:cNvSpPr/>
+          <p:nvPr/>
+        </p:nvSpPr>
+        <p:spPr>
+          <a:xfrm>
+            <a:off x="7543800" y="1234440"/>
+            <a:ext cx="731520" cy="731520"/>
           </a:xfrm>
           <a:prstGeom prst="rect">
             <a:avLst/>
@@ -4573,36 +4512,19 @@
               <a:buNone/>
             </a:pPr>
             <a:r>
-              <a:rPr lang="en-US" sz="3000" dirty="0">
-                <a:solidFill>
-                  <a:srgbClr val="000000"/>
-                </a:solidFill>
-              </a:rPr>
-              <a:t>👁️</a:t>
-            </a:r>
-            <a:endParaRPr lang="en-US" sz="3000" dirty="0"/>
-          </a:p>
-        </p:txBody>
-      </p:sp>
-      <p:sp>
-        <p:nvSpPr>
-          <p:cNvPr id="18" name="Shape 16"/>
-          <p:cNvSpPr/>
-          <p:nvPr/>
-        </p:nvSpPr>
-        <p:spPr>
-          <a:xfrm>
-            <a:off x="6995160" y="1874520"/>
-            <a:ext cx="1828800" cy="365760"/>
-          </a:xfrm>
-          <a:prstGeom prst="rect">
-            <a:avLst/>
-          </a:prstGeom>
-          <a:solidFill>
-            <a:srgbClr val="2C5AA0"/>
-          </a:solidFill>
-          <a:ln/>
-        </p:spPr>
+              <a:rPr lang="en-US" sz="2600" b="1" dirty="0">
+                <a:solidFill>
+                  <a:srgbClr val="FFFFFF"/>
+                </a:solidFill>
+                <a:latin typeface="Segoe UI" pitchFamily="34" charset="0"/>
+                <a:ea typeface="Segoe UI" pitchFamily="34" charset="-122"/>
+                <a:cs typeface="Segoe UI" pitchFamily="34" charset="-120"/>
+              </a:rPr>
+              <a:t>4</a:t>
+            </a:r>
+            <a:endParaRPr lang="en-US" sz="2600" dirty="0"/>
+          </a:p>
+        </p:txBody>
       </p:sp>
       <p:sp>
         <p:nvSpPr>
@@ -4612,8 +4534,8 @@
         </p:nvSpPr>
         <p:spPr>
           <a:xfrm>
-            <a:off x="6903720" y="2286000"/>
-            <a:ext cx="2011680" cy="914400"/>
+            <a:off x="6995160" y="2103120"/>
+            <a:ext cx="1828800" cy="1097280"/>
           </a:xfrm>
           <a:prstGeom prst="rect">
             <a:avLst/>
@@ -4674,8 +4596,8 @@
         </p:nvSpPr>
         <p:spPr>
           <a:xfrm>
-            <a:off x="2148840" y="1828800"/>
-            <a:ext cx="365760" cy="457200"/>
+            <a:off x="2103120" y="1920240"/>
+            <a:ext cx="457200" cy="457200"/>
           </a:xfrm>
           <a:prstGeom prst="rect">
             <a:avLst/>
@@ -4691,14 +4613,17 @@
               <a:buNone/>
             </a:pPr>
             <a:r>
-              <a:rPr lang="en-US" sz="2400" dirty="0">
+              <a:rPr lang="en-US" sz="2000" dirty="0">
                 <a:solidFill>
                   <a:srgbClr val="4A90D9"/>
                 </a:solidFill>
-              </a:rPr>
-              <a:t>→</a:t>
-            </a:r>
-            <a:endParaRPr lang="en-US" sz="2400" dirty="0"/>
+                <a:latin typeface="Segoe UI" pitchFamily="34" charset="0"/>
+                <a:ea typeface="Segoe UI" pitchFamily="34" charset="-122"/>
+                <a:cs typeface="Segoe UI" pitchFamily="34" charset="-120"/>
+              </a:rPr>
+              <a:t>▶</a:t>
+            </a:r>
+            <a:endParaRPr lang="en-US" sz="2000" dirty="0"/>
           </a:p>
         </p:txBody>
       </p:sp>
@@ -4710,8 +4635,8 @@
         </p:nvSpPr>
         <p:spPr>
           <a:xfrm>
-            <a:off x="4389120" y="1828800"/>
-            <a:ext cx="365760" cy="457200"/>
+            <a:off x="4343400" y="1920240"/>
+            <a:ext cx="457200" cy="457200"/>
           </a:xfrm>
           <a:prstGeom prst="rect">
             <a:avLst/>
@@ -4727,14 +4652,17 @@
               <a:buNone/>
             </a:pPr>
             <a:r>
-              <a:rPr lang="en-US" sz="2400" dirty="0">
+              <a:rPr lang="en-US" sz="2000" dirty="0">
                 <a:solidFill>
                   <a:srgbClr val="4A90D9"/>
                 </a:solidFill>
-              </a:rPr>
-              <a:t>→</a:t>
-            </a:r>
-            <a:endParaRPr lang="en-US" sz="2400" dirty="0"/>
+                <a:latin typeface="Segoe UI" pitchFamily="34" charset="0"/>
+                <a:ea typeface="Segoe UI" pitchFamily="34" charset="-122"/>
+                <a:cs typeface="Segoe UI" pitchFamily="34" charset="-120"/>
+              </a:rPr>
+              <a:t>▶</a:t>
+            </a:r>
+            <a:endParaRPr lang="en-US" sz="2000" dirty="0"/>
           </a:p>
         </p:txBody>
       </p:sp>
@@ -4746,8 +4674,8 @@
         </p:nvSpPr>
         <p:spPr>
           <a:xfrm>
-            <a:off x="6629400" y="1828800"/>
-            <a:ext cx="365760" cy="457200"/>
+            <a:off x="6583680" y="1920240"/>
+            <a:ext cx="457200" cy="457200"/>
           </a:xfrm>
           <a:prstGeom prst="rect">
             <a:avLst/>
@@ -4763,14 +4691,17 @@
               <a:buNone/>
             </a:pPr>
             <a:r>
-              <a:rPr lang="en-US" sz="2400" dirty="0">
+              <a:rPr lang="en-US" sz="2000" dirty="0">
                 <a:solidFill>
                   <a:srgbClr val="4A90D9"/>
                 </a:solidFill>
-              </a:rPr>
-              <a:t>→</a:t>
-            </a:r>
-            <a:endParaRPr lang="en-US" sz="2400" dirty="0"/>
+                <a:latin typeface="Segoe UI" pitchFamily="34" charset="0"/>
+                <a:ea typeface="Segoe UI" pitchFamily="34" charset="-122"/>
+                <a:cs typeface="Segoe UI" pitchFamily="34" charset="-120"/>
+              </a:rPr>
+              <a:t>▶</a:t>
+            </a:r>
+            <a:endParaRPr lang="en-US" sz="2000" dirty="0"/>
           </a:p>
         </p:txBody>
       </p:sp>
